--- a/dist/초6/영어/말하기와쓰기/초6_영어_말하기와쓰기_01_계획말하기.pptx
+++ b/dist/초6/영어/말하기와쓰기/초6_영어_말하기와쓰기_01_계획말하기.pptx
@@ -120,20 +120,20 @@
   <p:extLst>
     <p:ext uri="{521415D9-36F7-43E2-AB2F-B90AF26B5E84}">
       <p14:sectionLst xmlns:p14="http://schemas.microsoft.com/office/powerpoint/2010/main">
-        <p14:section name="도입" id="{8135ce9a-6262-7df7-63a6-c0ea90e778f7}">
+        <p14:section name="도입" id="{6c94d225-07a8-2681-566c-5e201d20b915}">
           <p14:sldIdLst>
             <p14:sldId id="256"/>
             <p14:sldId id="257"/>
           </p14:sldIdLst>
         </p14:section>
-        <p14:section name="개념" id="{2becb5d9-30c0-b0c0-3f92-eae52008d9d3}">
+        <p14:section name="개념" id="{7179cc4b-d6a4-bca8-275f-d20e5830a7b6}">
           <p14:sldIdLst>
             <p14:sldId id="258"/>
             <p14:sldId id="259"/>
             <p14:sldId id="260"/>
           </p14:sldIdLst>
         </p14:section>
-        <p14:section name="연습" id="{f80a9ecc-a0b0-8400-ca5c-fb1c4ff820af}">
+        <p14:section name="연습" id="{f99942a9-e34c-76bc-dcbf-428314b9952b}">
           <p14:sldIdLst>
             <p14:sldId id="261"/>
             <p14:sldId id="262"/>
@@ -141,19 +141,19 @@
             <p14:sldId id="264"/>
           </p14:sldIdLst>
         </p14:section>
-        <p14:section name="확인" id="{e9e134da-46af-fe75-7b74-4274f87db130}">
+        <p14:section name="확인" id="{8854594a-d122-1c41-bd0b-a3476e7aa408}">
           <p14:sldIdLst>
             <p14:sldId id="265"/>
             <p14:sldId id="266"/>
             <p14:sldId id="267"/>
           </p14:sldIdLst>
         </p14:section>
-        <p14:section name="정리" id="{4d6c40cb-e102-91b0-33c2-d94030ee7ce4}">
+        <p14:section name="정리" id="{da7c07b2-d123-335e-5ad3-901748b8e0fb}">
           <p14:sldIdLst>
             <p14:sldId id="268"/>
           </p14:sldIdLst>
         </p14:section>
-        <p14:section name="보충" id="{8ba430e3-2509-08d9-136a-cad65c2ea4f5}">
+        <p14:section name="보충" id="{1dc04c78-74f5-c528-ed4f-65ecd63212b2}">
           <p14:sldIdLst>
             <p14:sldId id="269"/>
           </p14:sldIdLst>
@@ -6573,8 +6573,8 @@
         </p:nvSpPr>
         <p:spPr>
           <a:xfrm>
-            <a:off x="868680" y="2376551"/>
-            <a:ext cx="3422904" cy="454025"/>
+            <a:off x="868680" y="2211451"/>
+            <a:ext cx="3422904" cy="619125"/>
           </a:xfrm>
           <a:prstGeom prst="rect">
             <a:avLst/>
@@ -6590,7 +6590,7 @@
               <a:buNone/>
             </a:pPr>
             <a:r>
-              <a:rPr lang="en-US" altLang="ko-KR" sz="2200" b="1" dirty="0">
+              <a:rPr lang="en-US" altLang="ko-KR" sz="3000" b="1" dirty="0">
                 <a:solidFill>
                   <a:srgbClr val="1F2937"/>
                 </a:solidFill>
@@ -6600,7 +6600,7 @@
               </a:rPr>
               <a:t>yesterday</a:t>
             </a:r>
-            <a:endParaRPr lang="ko-KR" sz="2200" dirty="0"/>
+            <a:endParaRPr lang="ko-KR" sz="3000" dirty="0"/>
           </a:p>
         </p:txBody>
       </p:sp>
@@ -6613,7 +6613,7 @@
         <p:spPr>
           <a:xfrm>
             <a:off x="868680" y="3287776"/>
-            <a:ext cx="3422904" cy="342900"/>
+            <a:ext cx="3422904" cy="474980"/>
           </a:xfrm>
           <a:prstGeom prst="rect">
             <a:avLst/>
@@ -6629,7 +6629,7 @@
               <a:buNone/>
             </a:pPr>
             <a:r>
-              <a:rPr lang="ko-KR" altLang="en-US" sz="1800" dirty="0">
+              <a:rPr lang="ko-KR" altLang="en-US" sz="2600" dirty="0">
                 <a:solidFill>
                   <a:srgbClr val="4B5563"/>
                 </a:solidFill>
@@ -6639,7 +6639,7 @@
               </a:rPr>
               <a:t>어제 · 지난 일</a:t>
             </a:r>
-            <a:endParaRPr lang="ko-KR" sz="1800" dirty="0"/>
+            <a:endParaRPr lang="ko-KR" sz="2600" dirty="0"/>
           </a:p>
         </p:txBody>
       </p:sp>
@@ -6676,8 +6676,8 @@
         </p:nvSpPr>
         <p:spPr>
           <a:xfrm>
-            <a:off x="4383024" y="2376551"/>
-            <a:ext cx="3422904" cy="454025"/>
+            <a:off x="4383024" y="2211451"/>
+            <a:ext cx="3422904" cy="619125"/>
           </a:xfrm>
           <a:prstGeom prst="rect">
             <a:avLst/>
@@ -6693,7 +6693,7 @@
               <a:buNone/>
             </a:pPr>
             <a:r>
-              <a:rPr lang="en-US" altLang="ko-KR" sz="2200" b="1" dirty="0">
+              <a:rPr lang="en-US" altLang="ko-KR" sz="3000" b="1" dirty="0">
                 <a:solidFill>
                   <a:srgbClr val="1F2937"/>
                 </a:solidFill>
@@ -6703,7 +6703,7 @@
               </a:rPr>
               <a:t>today</a:t>
             </a:r>
-            <a:endParaRPr lang="ko-KR" sz="2200" dirty="0"/>
+            <a:endParaRPr lang="ko-KR" sz="3000" dirty="0"/>
           </a:p>
         </p:txBody>
       </p:sp>
@@ -6716,7 +6716,7 @@
         <p:spPr>
           <a:xfrm>
             <a:off x="4383024" y="3287776"/>
-            <a:ext cx="3422904" cy="342900"/>
+            <a:ext cx="3422904" cy="474980"/>
           </a:xfrm>
           <a:prstGeom prst="rect">
             <a:avLst/>
@@ -6732,7 +6732,7 @@
               <a:buNone/>
             </a:pPr>
             <a:r>
-              <a:rPr lang="ko-KR" altLang="en-US" sz="1800" dirty="0">
+              <a:rPr lang="ko-KR" altLang="en-US" sz="2600" dirty="0">
                 <a:solidFill>
                   <a:srgbClr val="4B5563"/>
                 </a:solidFill>
@@ -6742,7 +6742,7 @@
               </a:rPr>
               <a:t>오늘</a:t>
             </a:r>
-            <a:endParaRPr lang="ko-KR" sz="1800" dirty="0"/>
+            <a:endParaRPr lang="ko-KR" sz="2600" dirty="0"/>
           </a:p>
         </p:txBody>
       </p:sp>
@@ -6779,8 +6779,8 @@
         </p:nvSpPr>
         <p:spPr>
           <a:xfrm>
-            <a:off x="7897368" y="2376551"/>
-            <a:ext cx="3422904" cy="454025"/>
+            <a:off x="7897368" y="2211451"/>
+            <a:ext cx="3422904" cy="619125"/>
           </a:xfrm>
           <a:prstGeom prst="rect">
             <a:avLst/>
@@ -6796,7 +6796,7 @@
               <a:buNone/>
             </a:pPr>
             <a:r>
-              <a:rPr lang="en-US" altLang="ko-KR" sz="2200" b="1" dirty="0">
+              <a:rPr lang="en-US" altLang="ko-KR" sz="3000" b="1" dirty="0">
                 <a:solidFill>
                   <a:srgbClr val="1F2937"/>
                 </a:solidFill>
@@ -6806,7 +6806,7 @@
               </a:rPr>
               <a:t>tomorrow</a:t>
             </a:r>
-            <a:endParaRPr lang="ko-KR" sz="2200" dirty="0"/>
+            <a:endParaRPr lang="ko-KR" sz="3000" dirty="0"/>
           </a:p>
         </p:txBody>
       </p:sp>
@@ -6819,7 +6819,7 @@
         <p:spPr>
           <a:xfrm>
             <a:off x="7897368" y="3287776"/>
-            <a:ext cx="3422904" cy="342900"/>
+            <a:ext cx="3422904" cy="474980"/>
           </a:xfrm>
           <a:prstGeom prst="rect">
             <a:avLst/>
@@ -6835,7 +6835,7 @@
               <a:buNone/>
             </a:pPr>
             <a:r>
-              <a:rPr lang="ko-KR" altLang="en-US" sz="1800" dirty="0">
+              <a:rPr lang="ko-KR" altLang="en-US" sz="2600" dirty="0">
                 <a:solidFill>
                   <a:srgbClr val="4B5563"/>
                 </a:solidFill>
@@ -6845,7 +6845,7 @@
               </a:rPr>
               <a:t>내일 · 계획</a:t>
             </a:r>
-            <a:endParaRPr lang="ko-KR" sz="1800" dirty="0"/>
+            <a:endParaRPr lang="ko-KR" sz="2600" dirty="0"/>
           </a:p>
         </p:txBody>
       </p:sp>
@@ -8707,7 +8707,7 @@
                 <a:ea typeface="맑은 고딕" pitchFamily="34" charset="-122"/>
                 <a:cs typeface="맑은 고딕" pitchFamily="34" charset="-120"/>
               </a:rPr>
-              <a:t>지난 일: yesterday, -ed　·　계획: tomorrow, this weekend, going to</a:t>
+              <a:t>지난 일: yesterday, -ed　·　계획: tomorrow, this weekend, going to</a:t>
             </a:r>
             <a:endParaRPr lang="ko-KR" sz="2800" dirty="0"/>
           </a:p>

--- a/dist/초6/영어/말하기와쓰기/초6_영어_말하기와쓰기_01_계획말하기.pptx
+++ b/dist/초6/영어/말하기와쓰기/초6_영어_말하기와쓰기_01_계획말하기.pptx
@@ -120,20 +120,20 @@
   <p:extLst>
     <p:ext uri="{521415D9-36F7-43E2-AB2F-B90AF26B5E84}">
       <p14:sectionLst xmlns:p14="http://schemas.microsoft.com/office/powerpoint/2010/main">
-        <p14:section name="도입" id="{6c94d225-07a8-2681-566c-5e201d20b915}">
+        <p14:section name="도입" id="{b23778dd-8636-5a9c-0cd1-b86f893ae7e3}">
           <p14:sldIdLst>
             <p14:sldId id="256"/>
             <p14:sldId id="257"/>
           </p14:sldIdLst>
         </p14:section>
-        <p14:section name="개념" id="{7179cc4b-d6a4-bca8-275f-d20e5830a7b6}">
+        <p14:section name="개념" id="{f4313820-cae5-9bff-1771-013d9799a0cb}">
           <p14:sldIdLst>
             <p14:sldId id="258"/>
             <p14:sldId id="259"/>
             <p14:sldId id="260"/>
           </p14:sldIdLst>
         </p14:section>
-        <p14:section name="연습" id="{f99942a9-e34c-76bc-dcbf-428314b9952b}">
+        <p14:section name="연습" id="{7d55744b-d8df-913d-8f6f-64ca58c24ca6}">
           <p14:sldIdLst>
             <p14:sldId id="261"/>
             <p14:sldId id="262"/>
@@ -141,19 +141,19 @@
             <p14:sldId id="264"/>
           </p14:sldIdLst>
         </p14:section>
-        <p14:section name="확인" id="{8854594a-d122-1c41-bd0b-a3476e7aa408}">
+        <p14:section name="확인" id="{6b7708ae-620e-0228-c8ad-8a9c2573e438}">
           <p14:sldIdLst>
             <p14:sldId id="265"/>
             <p14:sldId id="266"/>
             <p14:sldId id="267"/>
           </p14:sldIdLst>
         </p14:section>
-        <p14:section name="정리" id="{da7c07b2-d123-335e-5ad3-901748b8e0fb}">
+        <p14:section name="정리" id="{cdaa0cbb-1c07-9598-c065-5c105cc6a247}">
           <p14:sldIdLst>
             <p14:sldId id="268"/>
           </p14:sldIdLst>
         </p14:section>
-        <p14:section name="보충" id="{1dc04c78-74f5-c528-ed4f-65ecd63212b2}">
+        <p14:section name="보충" id="{5bf917d3-de14-a5a3-2dc1-483c37962c60}">
           <p14:sldIdLst>
             <p14:sldId id="269"/>
           </p14:sldIdLst>
@@ -869,7 +869,7 @@
 - “나머지는 어디가 틀렸어?”
 정답
 - 다. I'm going to play tennis tomorrow.
-- 가는 plays → play, 나는 I 다음에 am(’m)이 빠짐, 라는 played → play로 고쳐야 합니다.
+- 가는 plays → play, 나는 I 다음에 am('m)이 빠짐, 라는 played → play로 고쳐야 합니다.
 막히면
 - I'm이 있는지, going to 다음 낱말이 기본 모양인지 두 가지만 차례로 확인하게 합니다.</a:t>
             </a:r>
@@ -1375,7 +1375,7 @@
 - I'm going to를 한 덩어리로 세 번 말한 뒤 동사를 붙이게 합니다.
 - 동사가 떠오르지 않으면 카드의 read, play, visit 가운데 고르게 합니다.
 주의
-- I'm의 아포스트로피(')는 am의 a가 빠진 자리라는 표시입니다. I going to처럼 am(’m)을 빼지 않게 합니다(M2).
+- I'm의 아포스트로피(')는 am의 a가 빠진 자리라는 표시입니다. I going to처럼 am('m)을 빼지 않게 합니다(M2).
 - 때를 나타내는 말(tomorrow, this weekend)은 보통 문장 끝에 붙입니다.</a:t>
             </a:r>
             <a:endParaRPr lang="en-US" dirty="0"/>
@@ -4226,7 +4226,7 @@
                 <a:ea typeface="맑은 고딕" pitchFamily="34" charset="-122"/>
                 <a:cs typeface="맑은 고딕" pitchFamily="34" charset="-120"/>
               </a:rPr>
-              <a:t>am(’m)이 빠짐</a:t>
+              <a:t>am('m)이 빠짐</a:t>
             </a:r>
             <a:endParaRPr lang="ko-KR" sz="2200" dirty="0"/>
           </a:p>
